--- a/TrainerDocs/Session_03_Data_to_Decisions_Analytics.pptx
+++ b/TrainerDocs/Session_03_Data_to_Decisions_Analytics.pptx
@@ -244,7 +244,7 @@
           <a:p>
             <a:fld id="{5EE70D10-B534-454B-87C5-4557ADB642FC}" type="datetimeFigureOut">
               <a:rPr lang="en-IN" smtClean="0"/>
-              <a:t>18-10-2026</a:t>
+              <a:t>22-10-2026</a:t>
             </a:fld>
             <a:endParaRPr lang="en-IN"/>
           </a:p>
@@ -691,7 +691,7 @@
           <a:p>
             <a:fld id="{8BD06F58-8D31-4C75-8335-FFD9B2F0892A}" type="datetime1">
               <a:rPr lang="en-US" smtClean="0"/>
-              <a:t>10/18/2026</a:t>
+              <a:t>10/22/2026</a:t>
             </a:fld>
             <a:endParaRPr lang="en-US"/>
           </a:p>
@@ -859,7 +859,7 @@
           <a:p>
             <a:fld id="{7A5EB817-C232-4784-ABA2-332E81FD50F6}" type="datetime1">
               <a:rPr lang="en-US" smtClean="0"/>
-              <a:t>10/18/2026</a:t>
+              <a:t>10/22/2026</a:t>
             </a:fld>
             <a:endParaRPr lang="en-US"/>
           </a:p>
@@ -1037,7 +1037,7 @@
           <a:p>
             <a:fld id="{E5172B40-229A-4C54-9323-39AF342E63F9}" type="datetime1">
               <a:rPr lang="en-US" smtClean="0"/>
-              <a:t>10/18/2026</a:t>
+              <a:t>10/22/2026</a:t>
             </a:fld>
             <a:endParaRPr lang="en-US"/>
           </a:p>
@@ -1205,7 +1205,7 @@
           <a:p>
             <a:fld id="{55FDBA8E-B021-496F-8799-E21D82775AED}" type="datetime1">
               <a:rPr lang="en-US" smtClean="0"/>
-              <a:t>10/18/2026</a:t>
+              <a:t>10/22/2026</a:t>
             </a:fld>
             <a:endParaRPr lang="en-US"/>
           </a:p>
@@ -1450,7 +1450,7 @@
           <a:p>
             <a:fld id="{5D2E2E2D-C4EE-4CF2-8804-1AA2CFD88C37}" type="datetime1">
               <a:rPr lang="en-US" smtClean="0"/>
-              <a:t>10/18/2026</a:t>
+              <a:t>10/22/2026</a:t>
             </a:fld>
             <a:endParaRPr lang="en-US"/>
           </a:p>
@@ -1735,7 +1735,7 @@
           <a:p>
             <a:fld id="{F9C706BE-F124-4AB4-A5DD-065D571E897F}" type="datetime1">
               <a:rPr lang="en-US" smtClean="0"/>
-              <a:t>10/18/2026</a:t>
+              <a:t>10/22/2026</a:t>
             </a:fld>
             <a:endParaRPr lang="en-US"/>
           </a:p>
@@ -2154,7 +2154,7 @@
           <a:p>
             <a:fld id="{CB165039-C9C3-452F-B92B-85709E363CDF}" type="datetime1">
               <a:rPr lang="en-US" smtClean="0"/>
-              <a:t>10/18/2026</a:t>
+              <a:t>10/22/2026</a:t>
             </a:fld>
             <a:endParaRPr lang="en-US"/>
           </a:p>
@@ -2271,7 +2271,7 @@
           <a:p>
             <a:fld id="{B4711B21-E654-4872-849B-71CF8610BB33}" type="datetime1">
               <a:rPr lang="en-US" smtClean="0"/>
-              <a:t>10/18/2026</a:t>
+              <a:t>10/22/2026</a:t>
             </a:fld>
             <a:endParaRPr lang="en-US"/>
           </a:p>
@@ -2366,7 +2366,7 @@
           <a:p>
             <a:fld id="{E4E20197-005E-4398-8435-00C20282AC0D}" type="datetime1">
               <a:rPr lang="en-US" smtClean="0"/>
-              <a:t>10/18/2026</a:t>
+              <a:t>10/22/2026</a:t>
             </a:fld>
             <a:endParaRPr lang="en-US"/>
           </a:p>
@@ -2646,7 +2646,7 @@
           <a:p>
             <a:fld id="{DEEE0FFC-1A5F-49E9-B044-F730A0119C25}" type="datetime1">
               <a:rPr lang="en-US" smtClean="0"/>
-              <a:t>10/18/2026</a:t>
+              <a:t>10/22/2026</a:t>
             </a:fld>
             <a:endParaRPr lang="en-US"/>
           </a:p>
@@ -2898,7 +2898,7 @@
           <a:p>
             <a:fld id="{1C312BAB-3751-42DE-85BD-69530E534B00}" type="datetime1">
               <a:rPr lang="en-US" smtClean="0"/>
-              <a:t>10/18/2026</a:t>
+              <a:t>10/22/2026</a:t>
             </a:fld>
             <a:endParaRPr lang="en-US"/>
           </a:p>
@@ -3109,7 +3109,7 @@
           <a:p>
             <a:fld id="{0A38E6F4-83AA-4AA4-BB40-D39C6B276C0B}" type="datetime1">
               <a:rPr lang="en-US" smtClean="0"/>
-              <a:t>10/18/2026</a:t>
+              <a:t>10/22/2026</a:t>
             </a:fld>
             <a:endParaRPr lang="en-US"/>
           </a:p>
@@ -5444,7 +5444,7 @@
 </file>
 
 <file path=ppt/slides/slide14.xml><?xml version="1.0" encoding="utf-8"?>
-<p:sld xmlns:a="http://schemas.openxmlformats.org/drawingml/2006/main" xmlns:r="http://schemas.openxmlformats.org/officeDocument/2006/relationships" xmlns:p="http://schemas.openxmlformats.org/presentationml/2006/main">
+<p:sld xmlns:a="http://schemas.openxmlformats.org/drawingml/2006/main" xmlns:r="http://schemas.openxmlformats.org/officeDocument/2006/relationships" xmlns:p="http://schemas.openxmlformats.org/presentationml/2006/main" show="0">
   <p:cSld>
     <p:bg>
       <p:bgPr>
@@ -5588,45 +5588,6 @@
                 <a:latin typeface="Aptos Display"/>
               </a:rPr>
               <a:t>Demo 1: From observation to insight</a:t>
-            </a:r>
-          </a:p>
-        </p:txBody>
-      </p:sp>
-      <p:sp>
-        <p:nvSpPr>
-          <p:cNvPr id="5" name="TextBox 4"/>
-          <p:cNvSpPr txBox="1"/>
-          <p:nvPr/>
-        </p:nvSpPr>
-        <p:spPr>
-          <a:xfrm>
-            <a:off x="640080" y="1417320"/>
-            <a:ext cx="10881360" cy="365760"/>
-          </a:xfrm>
-          <a:prstGeom prst="rect">
-            <a:avLst/>
-          </a:prstGeom>
-          <a:noFill/>
-        </p:spPr>
-        <p:txBody>
-          <a:bodyPr wrap="square" lIns="36576" tIns="18288" rIns="36576" bIns="18288">
-            <a:spAutoFit/>
-          </a:bodyPr>
-          <a:lstStyle/>
-          <a:p>
-            <a:pPr>
-              <a:spcAft>
-                <a:spcPts val="0"/>
-              </a:spcAft>
-            </a:pPr>
-            <a:r>
-              <a:rPr sz="1300" b="0" i="0">
-                <a:solidFill>
-                  <a:srgbClr val="616D7B"/>
-                </a:solidFill>
-                <a:latin typeface="Aptos"/>
-              </a:rPr>
-              <a:t>Illustrative patterns only. Replace them with findings supported by the dataset.</a:t>
             </a:r>
           </a:p>
         </p:txBody>
@@ -7913,7 +7874,7 @@
 </file>
 
 <file path=ppt/slides/slide19.xml><?xml version="1.0" encoding="utf-8"?>
-<p:sld xmlns:a="http://schemas.openxmlformats.org/drawingml/2006/main" xmlns:r="http://schemas.openxmlformats.org/officeDocument/2006/relationships" xmlns:p="http://schemas.openxmlformats.org/presentationml/2006/main">
+<p:sld xmlns:a="http://schemas.openxmlformats.org/drawingml/2006/main" xmlns:r="http://schemas.openxmlformats.org/officeDocument/2006/relationships" xmlns:p="http://schemas.openxmlformats.org/presentationml/2006/main" show="0">
   <p:cSld>
     <p:bg>
       <p:bgPr>
@@ -10982,7 +10943,7 @@
 </file>
 
 <file path=ppt/slides/slide22.xml><?xml version="1.0" encoding="utf-8"?>
-<p:sld xmlns:a="http://schemas.openxmlformats.org/drawingml/2006/main" xmlns:r="http://schemas.openxmlformats.org/officeDocument/2006/relationships" xmlns:p="http://schemas.openxmlformats.org/presentationml/2006/main">
+<p:sld xmlns:a="http://schemas.openxmlformats.org/drawingml/2006/main" xmlns:r="http://schemas.openxmlformats.org/officeDocument/2006/relationships" xmlns:p="http://schemas.openxmlformats.org/presentationml/2006/main" show="0">
   <p:cSld>
     <p:bg>
       <p:bgPr>
